--- a/decks/hist-tudors/hist-tudors_ch5_elizabeth.pptx
+++ b/decks/hist-tudors/hist-tudors_ch5_elizabeth.pptx
@@ -126,30 +126,30 @@
   <p:extLst>
     <p:ext uri="{521415D9-36F7-43E2-AB2F-B90AF26B5E84}">
       <p14:sectionLst xmlns:p14="http://schemas.microsoft.com/office/powerpoint/2010/main">
-        <p14:section name="Opening" id="{45fda548-2988-e6de-dc68-807a4b46e41c}">
+        <p14:section name="Opening" id="{474a85e7-8114-3810-86f8-4a141549077c}">
           <p14:sldIdLst>
             <p14:sldId id="256"/>
           </p14:sldIdLst>
         </p14:section>
-        <p14:section name="Gate" id="{2bda159d-7dd1-e852-7e43-3f9401fd8d3a}">
+        <p14:section name="Gate" id="{adff5252-c498-6b23-bcb4-3fa79773a87f}">
           <p14:sldIdLst>
             <p14:sldId id="257"/>
             <p14:sldId id="258"/>
           </p14:sldIdLst>
         </p14:section>
-        <p14:section name="Pre-teach" id="{027af71d-a24b-a886-4376-2971c1d1dfd0}">
+        <p14:section name="Pre-teach" id="{14bd4279-5ae1-8511-bac8-d590feb6d80f}">
           <p14:sldIdLst>
             <p14:sldId id="259"/>
             <p14:sldId id="260"/>
           </p14:sldIdLst>
         </p14:section>
-        <p14:section name="Read-along" id="{45ba5d9c-3ce3-b484-631a-192bef24768c}">
+        <p14:section name="Read-along" id="{7c7b3c09-259d-5184-8fe9-567c8a342a3e}">
           <p14:sldIdLst>
             <p14:sldId id="261"/>
             <p14:sldId id="262"/>
           </p14:sldIdLst>
         </p14:section>
-        <p14:section name="Teach" id="{aed16864-7938-a764-5473-ec9dfa2f8261}">
+        <p14:section name="Teach" id="{4152983c-2dd2-b587-5f5a-29033c2d7f72}">
           <p14:sldIdLst>
             <p14:sldId id="263"/>
             <p14:sldId id="264"/>
@@ -158,7 +158,7 @@
             <p14:sldId id="267"/>
           </p14:sldIdLst>
         </p14:section>
-        <p14:section name="Routes" id="{b54709c4-2947-e974-9f86-944c3ba1b186}">
+        <p14:section name="Routes" id="{ae520563-ea9f-1093-8e5f-de461ef9ef84}">
           <p14:sldIdLst>
             <p14:sldId id="268"/>
             <p14:sldId id="269"/>
@@ -166,12 +166,12 @@
             <p14:sldId id="271"/>
           </p14:sldIdLst>
         </p14:section>
-        <p14:section name="Close" id="{91f0efd4-fbe0-dff5-dd63-9f9c3bc55c0f}">
+        <p14:section name="Close" id="{b0b60db1-a0c2-99c0-5bbf-b1994fb7253e}">
           <p14:sldIdLst>
             <p14:sldId id="272"/>
           </p14:sldIdLst>
         </p14:section>
-        <p14:section name="Answers" id="{72048c0b-6c3d-6754-f8b2-72f21ec74f3e}">
+        <p14:section name="Answers" id="{bd85920e-64a8-ae39-0578-519da6c6cb1e}">
           <p14:sldIdLst>
             <p14:sldId id="273"/>
             <p14:sldId id="274"/>
